--- a/ONIP-FISA/Diffraction/ONIP-2_Diffraction.pptx
+++ b/ONIP-FISA/Diffraction/ONIP-2_Diffraction.pptx
@@ -217,7 +217,7 @@
           <a:p>
             <a:fld id="{95F60532-AC81-4152-B45E-E054A978F780}" type="datetimeFigureOut">
               <a:rPr lang="fr-FR" smtClean="0"/>
-              <a:t>18/03/2025</a:t>
+              <a:t>20/03/2026</a:t>
             </a:fld>
             <a:endParaRPr lang="fr-FR"/>
           </a:p>
@@ -1639,7 +1639,7 @@
           <a:p>
             <a:fld id="{02AC24A9-CCB6-4F8D-B8DB-C2F3692CFA5A}" type="datetimeFigureOut">
               <a:rPr lang="en-US" smtClean="0"/>
-              <a:t>3/18/2025</a:t>
+              <a:t>3/20/2026</a:t>
             </a:fld>
             <a:endParaRPr lang="en-US" dirty="0"/>
           </a:p>
@@ -2009,7 +2009,7 @@
           <a:p>
             <a:fld id="{02AC24A9-CCB6-4F8D-B8DB-C2F3692CFA5A}" type="datetimeFigureOut">
               <a:rPr lang="en-US" smtClean="0"/>
-              <a:t>3/18/2025</a:t>
+              <a:t>3/20/2026</a:t>
             </a:fld>
             <a:endParaRPr lang="en-US"/>
           </a:p>
@@ -2218,7 +2218,7 @@
           <a:p>
             <a:fld id="{02AC24A9-CCB6-4F8D-B8DB-C2F3692CFA5A}" type="datetimeFigureOut">
               <a:rPr lang="en-US" smtClean="0"/>
-              <a:t>3/18/2025</a:t>
+              <a:t>3/20/2026</a:t>
             </a:fld>
             <a:endParaRPr lang="en-US"/>
           </a:p>
@@ -2688,7 +2688,7 @@
           <a:p>
             <a:fld id="{02AC24A9-CCB6-4F8D-B8DB-C2F3692CFA5A}" type="datetimeFigureOut">
               <a:rPr lang="en-US" smtClean="0"/>
-              <a:t>3/18/2025</a:t>
+              <a:t>3/20/2026</a:t>
             </a:fld>
             <a:endParaRPr lang="en-US"/>
           </a:p>
@@ -3142,7 +3142,7 @@
           <a:p>
             <a:fld id="{02AC24A9-CCB6-4F8D-B8DB-C2F3692CFA5A}" type="datetimeFigureOut">
               <a:rPr lang="en-US" smtClean="0"/>
-              <a:t>3/18/2025</a:t>
+              <a:t>3/20/2026</a:t>
             </a:fld>
             <a:endParaRPr lang="en-US"/>
           </a:p>
@@ -3674,7 +3674,7 @@
           <a:p>
             <a:fld id="{02AC24A9-CCB6-4F8D-B8DB-C2F3692CFA5A}" type="datetimeFigureOut">
               <a:rPr lang="en-US" smtClean="0"/>
-              <a:t>3/18/2025</a:t>
+              <a:t>3/20/2026</a:t>
             </a:fld>
             <a:endParaRPr lang="en-US"/>
           </a:p>
@@ -4373,7 +4373,7 @@
           <a:p>
             <a:fld id="{02AC24A9-CCB6-4F8D-B8DB-C2F3692CFA5A}" type="datetimeFigureOut">
               <a:rPr lang="en-US" smtClean="0"/>
-              <a:t>3/18/2025</a:t>
+              <a:t>3/20/2026</a:t>
             </a:fld>
             <a:endParaRPr lang="en-US"/>
           </a:p>
@@ -4702,7 +4702,7 @@
           <a:p>
             <a:fld id="{02AC24A9-CCB6-4F8D-B8DB-C2F3692CFA5A}" type="datetimeFigureOut">
               <a:rPr lang="en-US" smtClean="0"/>
-              <a:t>3/18/2025</a:t>
+              <a:t>3/20/2026</a:t>
             </a:fld>
             <a:endParaRPr lang="en-US"/>
           </a:p>
@@ -4815,7 +4815,7 @@
           <a:p>
             <a:fld id="{02AC24A9-CCB6-4F8D-B8DB-C2F3692CFA5A}" type="datetimeFigureOut">
               <a:rPr lang="en-US" smtClean="0"/>
-              <a:t>3/18/2025</a:t>
+              <a:t>3/20/2026</a:t>
             </a:fld>
             <a:endParaRPr lang="en-US"/>
           </a:p>
@@ -5310,7 +5310,7 @@
           <a:p>
             <a:fld id="{02AC24A9-CCB6-4F8D-B8DB-C2F3692CFA5A}" type="datetimeFigureOut">
               <a:rPr lang="en-US" smtClean="0"/>
-              <a:t>3/18/2025</a:t>
+              <a:t>3/20/2026</a:t>
             </a:fld>
             <a:endParaRPr lang="en-US" dirty="0"/>
           </a:p>
@@ -5787,7 +5787,7 @@
           <a:p>
             <a:fld id="{02AC24A9-CCB6-4F8D-B8DB-C2F3692CFA5A}" type="datetimeFigureOut">
               <a:rPr lang="en-US" smtClean="0"/>
-              <a:t>3/18/2025</a:t>
+              <a:t>3/20/2026</a:t>
             </a:fld>
             <a:endParaRPr lang="en-US"/>
           </a:p>
@@ -6030,7 +6030,7 @@
           <a:p>
             <a:fld id="{02AC24A9-CCB6-4F8D-B8DB-C2F3692CFA5A}" type="datetimeFigureOut">
               <a:rPr lang="en-US" smtClean="0"/>
-              <a:t>3/18/2025</a:t>
+              <a:t>3/20/2026</a:t>
             </a:fld>
             <a:endParaRPr lang="en-US"/>
           </a:p>
@@ -7916,7 +7916,7 @@
                   <a:schemeClr val="tx1"/>
                 </a:solidFill>
               </a:rPr>
-              <a:t>Vendredi 4 avril 2025</a:t>
+              <a:t>Vendredi 10 avril 2026</a:t>
             </a:r>
           </a:p>
           <a:p>

--- a/ONIP-FISA/Diffraction/ONIP-2_Diffraction.pptx
+++ b/ONIP-FISA/Diffraction/ONIP-2_Diffraction.pptx
@@ -7940,6 +7940,103 @@
           </a:p>
         </p:txBody>
       </p:sp>
+      <p:sp>
+        <p:nvSpPr>
+          <p:cNvPr id="8" name="Rectangle 7">
+            <a:extLst>
+              <a:ext uri="{FF2B5EF4-FFF2-40B4-BE49-F238E27FC236}">
+                <a16:creationId xmlns:a16="http://schemas.microsoft.com/office/drawing/2014/main" id="{81DE84C3-5383-A7C2-072F-4FAF8ECD9C99}"/>
+              </a:ext>
+            </a:extLst>
+          </p:cNvPr>
+          <p:cNvSpPr/>
+          <p:nvPr/>
+        </p:nvSpPr>
+        <p:spPr>
+          <a:xfrm>
+            <a:off x="3443922" y="6012441"/>
+            <a:ext cx="1695641" cy="690599"/>
+          </a:xfrm>
+          <a:prstGeom prst="rect">
+            <a:avLst/>
+          </a:prstGeom>
+          <a:solidFill>
+            <a:srgbClr val="D6B4B2"/>
+          </a:solidFill>
+          <a:ln>
+            <a:noFill/>
+          </a:ln>
+        </p:spPr>
+        <p:style>
+          <a:lnRef idx="2">
+            <a:schemeClr val="accent1">
+              <a:shade val="15000"/>
+            </a:schemeClr>
+          </a:lnRef>
+          <a:fillRef idx="1">
+            <a:schemeClr val="accent1"/>
+          </a:fillRef>
+          <a:effectRef idx="0">
+            <a:schemeClr val="accent1"/>
+          </a:effectRef>
+          <a:fontRef idx="minor">
+            <a:schemeClr val="lt1"/>
+          </a:fontRef>
+        </p:style>
+        <p:txBody>
+          <a:bodyPr rtlCol="0" anchor="ctr"/>
+          <a:lstStyle/>
+          <a:p>
+            <a:r>
+              <a:rPr lang="fr-FR" sz="1200" b="1" dirty="0">
+                <a:solidFill>
+                  <a:schemeClr val="tx1"/>
+                </a:solidFill>
+              </a:rPr>
+              <a:t>CR</a:t>
+            </a:r>
+            <a:r>
+              <a:rPr lang="fr-FR" sz="1200" dirty="0">
+                <a:solidFill>
+                  <a:schemeClr val="tx1"/>
+                </a:solidFill>
+              </a:rPr>
+              <a:t> -&gt; PDF</a:t>
+            </a:r>
+          </a:p>
+          <a:p>
+            <a:r>
+              <a:rPr lang="fr-FR" sz="1200" b="1" dirty="0" err="1">
+                <a:solidFill>
+                  <a:schemeClr val="tx1"/>
+                </a:solidFill>
+              </a:rPr>
+              <a:t>Code</a:t>
+            </a:r>
+            <a:r>
+              <a:rPr lang="fr-FR" sz="1200" dirty="0" err="1">
+                <a:solidFill>
+                  <a:schemeClr val="tx1"/>
+                </a:solidFill>
+              </a:rPr>
+              <a:t>+Images</a:t>
+            </a:r>
+            <a:r>
+              <a:rPr lang="fr-FR" sz="1200" dirty="0">
+                <a:solidFill>
+                  <a:schemeClr val="tx1"/>
+                </a:solidFill>
+              </a:rPr>
+              <a:t> -&gt; ZIP</a:t>
+            </a:r>
+            <a:endParaRPr lang="fr-FR" sz="1050" dirty="0">
+              <a:solidFill>
+                <a:schemeClr val="tx1"/>
+              </a:solidFill>
+            </a:endParaRPr>
+          </a:p>
+        </p:txBody>
+      </p:sp>
     </p:spTree>
     <p:extLst>
       <p:ext uri="{BB962C8B-B14F-4D97-AF65-F5344CB8AC3E}">
@@ -8685,10 +8782,10 @@
       </p:sp>
       <p:sp>
         <p:nvSpPr>
-          <p:cNvPr id="8" name="Rectangle 7">
-            <a:extLst>
-              <a:ext uri="{FF2B5EF4-FFF2-40B4-BE49-F238E27FC236}">
-                <a16:creationId xmlns:a16="http://schemas.microsoft.com/office/drawing/2014/main" id="{D8BE85BC-4EC6-68AE-673A-DB0EFDBD3520}"/>
+          <p:cNvPr id="5" name="Rectangle 4">
+            <a:extLst>
+              <a:ext uri="{FF2B5EF4-FFF2-40B4-BE49-F238E27FC236}">
+                <a16:creationId xmlns:a16="http://schemas.microsoft.com/office/drawing/2014/main" id="{A23AA351-18A7-B83B-7041-A82D42F73079}"/>
               </a:ext>
             </a:extLst>
           </p:cNvPr>
@@ -8704,10 +8801,12 @@
             <a:avLst/>
           </a:prstGeom>
           <a:solidFill>
-            <a:srgbClr val="002060"/>
+            <a:schemeClr val="bg1"/>
           </a:solidFill>
           <a:ln>
-            <a:noFill/>
+            <a:solidFill>
+              <a:srgbClr val="002060"/>
+            </a:solidFill>
           </a:ln>
         </p:spPr>
         <p:style>
@@ -8737,10 +8836,10 @@
       </p:sp>
       <p:sp>
         <p:nvSpPr>
-          <p:cNvPr id="11" name="Rectangle 10">
-            <a:extLst>
-              <a:ext uri="{FF2B5EF4-FFF2-40B4-BE49-F238E27FC236}">
-                <a16:creationId xmlns:a16="http://schemas.microsoft.com/office/drawing/2014/main" id="{E03280E2-A3F0-03CB-7863-26E43FDFAACD}"/>
+          <p:cNvPr id="19" name="Rectangle 18">
+            <a:extLst>
+              <a:ext uri="{FF2B5EF4-FFF2-40B4-BE49-F238E27FC236}">
+                <a16:creationId xmlns:a16="http://schemas.microsoft.com/office/drawing/2014/main" id="{BC498651-33DD-D781-0428-D50CB2808F70}"/>
               </a:ext>
             </a:extLst>
           </p:cNvPr>
@@ -8799,10 +8898,10 @@
       </p:sp>
       <p:sp>
         <p:nvSpPr>
-          <p:cNvPr id="13" name="Rectangle 12">
-            <a:extLst>
-              <a:ext uri="{FF2B5EF4-FFF2-40B4-BE49-F238E27FC236}">
-                <a16:creationId xmlns:a16="http://schemas.microsoft.com/office/drawing/2014/main" id="{098DA644-EC8C-61FE-90A2-778EF2B7DF36}"/>
+          <p:cNvPr id="25" name="Rectangle 24">
+            <a:extLst>
+              <a:ext uri="{FF2B5EF4-FFF2-40B4-BE49-F238E27FC236}">
+                <a16:creationId xmlns:a16="http://schemas.microsoft.com/office/drawing/2014/main" id="{006005BB-79F2-8181-0346-B60B1C0C4F3F}"/>
               </a:ext>
             </a:extLst>
           </p:cNvPr>
@@ -8845,16 +8944,19 @@
           <a:lstStyle/>
           <a:p>
             <a:pPr algn="ctr"/>
-            <a:endParaRPr lang="fr-FR" sz="1600" dirty="0"/>
-          </a:p>
-        </p:txBody>
-      </p:sp>
-      <p:sp>
-        <p:nvSpPr>
-          <p:cNvPr id="14" name="Rectangle 13">
-            <a:extLst>
-              <a:ext uri="{FF2B5EF4-FFF2-40B4-BE49-F238E27FC236}">
-                <a16:creationId xmlns:a16="http://schemas.microsoft.com/office/drawing/2014/main" id="{021B992C-31E5-6213-5092-4CCBE55F2B39}"/>
+            <a:r>
+              <a:rPr lang="fr-FR" sz="1600" dirty="0"/>
+              <a:t>1</a:t>
+            </a:r>
+          </a:p>
+        </p:txBody>
+      </p:sp>
+      <p:sp>
+        <p:nvSpPr>
+          <p:cNvPr id="26" name="Rectangle 25">
+            <a:extLst>
+              <a:ext uri="{FF2B5EF4-FFF2-40B4-BE49-F238E27FC236}">
+                <a16:creationId xmlns:a16="http://schemas.microsoft.com/office/drawing/2014/main" id="{115164A4-12D0-C2AC-17C4-CF7011E345DC}"/>
               </a:ext>
             </a:extLst>
           </p:cNvPr>
@@ -8897,16 +8999,19 @@
           <a:lstStyle/>
           <a:p>
             <a:pPr algn="ctr"/>
-            <a:endParaRPr lang="fr-FR" sz="1600" dirty="0"/>
-          </a:p>
-        </p:txBody>
-      </p:sp>
-      <p:sp>
-        <p:nvSpPr>
-          <p:cNvPr id="15" name="Rectangle 14">
-            <a:extLst>
-              <a:ext uri="{FF2B5EF4-FFF2-40B4-BE49-F238E27FC236}">
-                <a16:creationId xmlns:a16="http://schemas.microsoft.com/office/drawing/2014/main" id="{0D770ED0-474D-9648-552F-CF79EB8C490D}"/>
+            <a:r>
+              <a:rPr lang="fr-FR" sz="1600" dirty="0"/>
+              <a:t>2</a:t>
+            </a:r>
+          </a:p>
+        </p:txBody>
+      </p:sp>
+      <p:sp>
+        <p:nvSpPr>
+          <p:cNvPr id="27" name="Rectangle 26">
+            <a:extLst>
+              <a:ext uri="{FF2B5EF4-FFF2-40B4-BE49-F238E27FC236}">
+                <a16:creationId xmlns:a16="http://schemas.microsoft.com/office/drawing/2014/main" id="{75AD914B-9306-3133-B0DE-0A3C574A3732}"/>
               </a:ext>
             </a:extLst>
           </p:cNvPr>
@@ -8915,14 +9020,14 @@
         </p:nvSpPr>
         <p:spPr>
           <a:xfrm>
-            <a:off x="11327289" y="3244334"/>
+            <a:off x="11327289" y="4467223"/>
             <a:ext cx="387096" cy="369332"/>
           </a:xfrm>
           <a:prstGeom prst="rect">
             <a:avLst/>
           </a:prstGeom>
           <a:solidFill>
-            <a:srgbClr val="D6B4B2"/>
+            <a:srgbClr val="002060"/>
           </a:solidFill>
           <a:ln>
             <a:noFill/>
@@ -8949,16 +9054,19 @@
           <a:lstStyle/>
           <a:p>
             <a:pPr algn="ctr"/>
-            <a:endParaRPr lang="fr-FR" sz="1600" dirty="0"/>
-          </a:p>
-        </p:txBody>
-      </p:sp>
-      <p:sp>
-        <p:nvSpPr>
-          <p:cNvPr id="16" name="Rectangle 15">
-            <a:extLst>
-              <a:ext uri="{FF2B5EF4-FFF2-40B4-BE49-F238E27FC236}">
-                <a16:creationId xmlns:a16="http://schemas.microsoft.com/office/drawing/2014/main" id="{AD6AB33F-119B-3F1B-F6FF-1B69419C6403}"/>
+            <a:r>
+              <a:rPr lang="fr-FR" sz="1600" dirty="0"/>
+              <a:t>7</a:t>
+            </a:r>
+          </a:p>
+        </p:txBody>
+      </p:sp>
+      <p:sp>
+        <p:nvSpPr>
+          <p:cNvPr id="28" name="Rectangle 27">
+            <a:extLst>
+              <a:ext uri="{FF2B5EF4-FFF2-40B4-BE49-F238E27FC236}">
+                <a16:creationId xmlns:a16="http://schemas.microsoft.com/office/drawing/2014/main" id="{A73DB62A-ED54-4D41-38E2-3B897B54C48E}"/>
               </a:ext>
             </a:extLst>
           </p:cNvPr>
@@ -9017,10 +9125,10 @@
       </p:sp>
       <p:sp>
         <p:nvSpPr>
-          <p:cNvPr id="17" name="Rectangle 16">
-            <a:extLst>
-              <a:ext uri="{FF2B5EF4-FFF2-40B4-BE49-F238E27FC236}">
-                <a16:creationId xmlns:a16="http://schemas.microsoft.com/office/drawing/2014/main" id="{FB575922-835C-241C-709B-AB12BD7E173C}"/>
+          <p:cNvPr id="29" name="Rectangle 28">
+            <a:extLst>
+              <a:ext uri="{FF2B5EF4-FFF2-40B4-BE49-F238E27FC236}">
+                <a16:creationId xmlns:a16="http://schemas.microsoft.com/office/drawing/2014/main" id="{582E1E6E-2D5C-12BC-314F-21674F8BD09D}"/>
               </a:ext>
             </a:extLst>
           </p:cNvPr>
@@ -9076,10 +9184,10 @@
       </p:sp>
       <p:sp>
         <p:nvSpPr>
-          <p:cNvPr id="18" name="Rectangle 17">
-            <a:extLst>
-              <a:ext uri="{FF2B5EF4-FFF2-40B4-BE49-F238E27FC236}">
-                <a16:creationId xmlns:a16="http://schemas.microsoft.com/office/drawing/2014/main" id="{86F7F968-D1E2-15AA-9E7A-58F30CD84152}"/>
+          <p:cNvPr id="30" name="Rectangle 29">
+            <a:extLst>
+              <a:ext uri="{FF2B5EF4-FFF2-40B4-BE49-F238E27FC236}">
+                <a16:creationId xmlns:a16="http://schemas.microsoft.com/office/drawing/2014/main" id="{01237102-B9E1-D4DB-1252-8AAA0CF1802E}"/>
               </a:ext>
             </a:extLst>
           </p:cNvPr>
@@ -9135,10 +9243,10 @@
       </p:sp>
       <p:sp>
         <p:nvSpPr>
-          <p:cNvPr id="20" name="Rectangle 19">
-            <a:extLst>
-              <a:ext uri="{FF2B5EF4-FFF2-40B4-BE49-F238E27FC236}">
-                <a16:creationId xmlns:a16="http://schemas.microsoft.com/office/drawing/2014/main" id="{B4740186-9013-1F9D-7EA1-44560C103898}"/>
+          <p:cNvPr id="31" name="Rectangle 30">
+            <a:extLst>
+              <a:ext uri="{FF2B5EF4-FFF2-40B4-BE49-F238E27FC236}">
+                <a16:creationId xmlns:a16="http://schemas.microsoft.com/office/drawing/2014/main" id="{DA548AAD-C2CC-D6E1-753B-3525FCC0672E}"/>
               </a:ext>
             </a:extLst>
           </p:cNvPr>
@@ -9181,16 +9289,19 @@
           <a:lstStyle/>
           <a:p>
             <a:pPr algn="ctr"/>
-            <a:endParaRPr lang="fr-FR" sz="1600" dirty="0"/>
-          </a:p>
-        </p:txBody>
-      </p:sp>
-      <p:sp>
-        <p:nvSpPr>
-          <p:cNvPr id="21" name="Rectangle 20">
-            <a:extLst>
-              <a:ext uri="{FF2B5EF4-FFF2-40B4-BE49-F238E27FC236}">
-                <a16:creationId xmlns:a16="http://schemas.microsoft.com/office/drawing/2014/main" id="{040E83FC-64FA-353E-D05A-9B1F5F5F25C8}"/>
+            <a:r>
+              <a:rPr lang="fr-FR" sz="1600" dirty="0"/>
+              <a:t>4</a:t>
+            </a:r>
+          </a:p>
+        </p:txBody>
+      </p:sp>
+      <p:sp>
+        <p:nvSpPr>
+          <p:cNvPr id="32" name="Rectangle 31">
+            <a:extLst>
+              <a:ext uri="{FF2B5EF4-FFF2-40B4-BE49-F238E27FC236}">
+                <a16:creationId xmlns:a16="http://schemas.microsoft.com/office/drawing/2014/main" id="{9BA9FFFB-49E9-1BCD-7E86-D28418633266}"/>
               </a:ext>
             </a:extLst>
           </p:cNvPr>
@@ -9206,7 +9317,7 @@
             <a:avLst/>
           </a:prstGeom>
           <a:solidFill>
-            <a:srgbClr val="D6B4B2"/>
+            <a:srgbClr val="002060"/>
           </a:solidFill>
           <a:ln>
             <a:noFill/>
@@ -9233,16 +9344,19 @@
           <a:lstStyle/>
           <a:p>
             <a:pPr algn="ctr"/>
-            <a:endParaRPr lang="fr-FR" sz="1600" dirty="0"/>
-          </a:p>
-        </p:txBody>
-      </p:sp>
-      <p:sp>
-        <p:nvSpPr>
-          <p:cNvPr id="22" name="Rectangle 21">
-            <a:extLst>
-              <a:ext uri="{FF2B5EF4-FFF2-40B4-BE49-F238E27FC236}">
-                <a16:creationId xmlns:a16="http://schemas.microsoft.com/office/drawing/2014/main" id="{A0EB135E-EF9B-D1F5-E612-5F0F278D99FE}"/>
+            <a:r>
+              <a:rPr lang="fr-FR" sz="1600" dirty="0"/>
+              <a:t>6</a:t>
+            </a:r>
+          </a:p>
+        </p:txBody>
+      </p:sp>
+      <p:sp>
+        <p:nvSpPr>
+          <p:cNvPr id="33" name="Rectangle 32">
+            <a:extLst>
+              <a:ext uri="{FF2B5EF4-FFF2-40B4-BE49-F238E27FC236}">
+                <a16:creationId xmlns:a16="http://schemas.microsoft.com/office/drawing/2014/main" id="{AC7D2E84-577A-1BB4-A24F-384ED6516FBA}"/>
               </a:ext>
             </a:extLst>
           </p:cNvPr>
@@ -9251,8 +9365,8 @@
         </p:nvSpPr>
         <p:spPr>
           <a:xfrm>
-            <a:off x="11327289" y="4798076"/>
-            <a:ext cx="387096" cy="369332"/>
+            <a:off x="10332720" y="4479277"/>
+            <a:ext cx="761073" cy="369332"/>
           </a:xfrm>
           <a:prstGeom prst="rect">
             <a:avLst/>
@@ -9285,16 +9399,23 @@
           <a:lstStyle/>
           <a:p>
             <a:pPr algn="ctr"/>
-            <a:endParaRPr lang="fr-FR" sz="1600" dirty="0"/>
-          </a:p>
-        </p:txBody>
-      </p:sp>
-      <p:sp>
-        <p:nvSpPr>
-          <p:cNvPr id="23" name="Rectangle 22">
-            <a:extLst>
-              <a:ext uri="{FF2B5EF4-FFF2-40B4-BE49-F238E27FC236}">
-                <a16:creationId xmlns:a16="http://schemas.microsoft.com/office/drawing/2014/main" id="{5DF7F23C-EF65-9DE8-7387-640B14B54474}"/>
+            <a:r>
+              <a:rPr lang="fr-FR" sz="1400" b="1" dirty="0">
+                <a:solidFill>
+                  <a:schemeClr val="tx1"/>
+                </a:solidFill>
+              </a:rPr>
+              <a:t>TP3a</a:t>
+            </a:r>
+          </a:p>
+        </p:txBody>
+      </p:sp>
+      <p:sp>
+        <p:nvSpPr>
+          <p:cNvPr id="35" name="Rectangle 34">
+            <a:extLst>
+              <a:ext uri="{FF2B5EF4-FFF2-40B4-BE49-F238E27FC236}">
+                <a16:creationId xmlns:a16="http://schemas.microsoft.com/office/drawing/2014/main" id="{E5BEFCD1-3AA7-C2AC-E479-7DDAD58519B1}"/>
               </a:ext>
             </a:extLst>
           </p:cNvPr>
@@ -9303,7 +9424,7 @@
         </p:nvSpPr>
         <p:spPr>
           <a:xfrm>
-            <a:off x="10332720" y="5198049"/>
+            <a:off x="10332720" y="5221587"/>
             <a:ext cx="761073" cy="369332"/>
           </a:xfrm>
           <a:prstGeom prst="rect">
@@ -9343,17 +9464,17 @@
                   <a:schemeClr val="tx1"/>
                 </a:solidFill>
               </a:rPr>
-              <a:t>TP3a</a:t>
-            </a:r>
-          </a:p>
-        </p:txBody>
-      </p:sp>
-      <p:sp>
-        <p:nvSpPr>
-          <p:cNvPr id="24" name="Rectangle 23">
-            <a:extLst>
-              <a:ext uri="{FF2B5EF4-FFF2-40B4-BE49-F238E27FC236}">
-                <a16:creationId xmlns:a16="http://schemas.microsoft.com/office/drawing/2014/main" id="{D81CF90D-44C0-BB2F-D938-BCC20C548A91}"/>
+              <a:t>TP3b</a:t>
+            </a:r>
+          </a:p>
+        </p:txBody>
+      </p:sp>
+      <p:sp>
+        <p:nvSpPr>
+          <p:cNvPr id="36" name="Rectangle 35">
+            <a:extLst>
+              <a:ext uri="{FF2B5EF4-FFF2-40B4-BE49-F238E27FC236}">
+                <a16:creationId xmlns:a16="http://schemas.microsoft.com/office/drawing/2014/main" id="{17B4D186-71AA-2D29-CE68-AE8CAA1385D2}"/>
               </a:ext>
             </a:extLst>
           </p:cNvPr>
@@ -9362,8 +9483,8 @@
         </p:nvSpPr>
         <p:spPr>
           <a:xfrm>
-            <a:off x="10332720" y="5598022"/>
-            <a:ext cx="761073" cy="369332"/>
+            <a:off x="11327289" y="5621560"/>
+            <a:ext cx="387096" cy="369332"/>
           </a:xfrm>
           <a:prstGeom prst="rect">
             <a:avLst/>
@@ -9397,22 +9518,18 @@
           <a:p>
             <a:pPr algn="ctr"/>
             <a:r>
-              <a:rPr lang="fr-FR" sz="1400" b="1" dirty="0">
-                <a:solidFill>
-                  <a:schemeClr val="tx1"/>
-                </a:solidFill>
-              </a:rPr>
-              <a:t>TP3b</a:t>
-            </a:r>
-          </a:p>
-        </p:txBody>
-      </p:sp>
-      <p:sp>
-        <p:nvSpPr>
-          <p:cNvPr id="34" name="Rectangle 33">
-            <a:extLst>
-              <a:ext uri="{FF2B5EF4-FFF2-40B4-BE49-F238E27FC236}">
-                <a16:creationId xmlns:a16="http://schemas.microsoft.com/office/drawing/2014/main" id="{9BED3722-DE00-706C-1FEF-87BE444AB70F}"/>
+              <a:rPr lang="fr-FR" sz="1600" dirty="0"/>
+              <a:t>9</a:t>
+            </a:r>
+          </a:p>
+        </p:txBody>
+      </p:sp>
+      <p:sp>
+        <p:nvSpPr>
+          <p:cNvPr id="37" name="Rectangle 36">
+            <a:extLst>
+              <a:ext uri="{FF2B5EF4-FFF2-40B4-BE49-F238E27FC236}">
+                <a16:creationId xmlns:a16="http://schemas.microsoft.com/office/drawing/2014/main" id="{9C268ABE-E735-781D-3C02-4BD698DCC403}"/>
               </a:ext>
             </a:extLst>
           </p:cNvPr>
@@ -9421,7 +9538,7 @@
         </p:nvSpPr>
         <p:spPr>
           <a:xfrm>
-            <a:off x="11327289" y="5198049"/>
+            <a:off x="10703028" y="5625691"/>
             <a:ext cx="387096" cy="369332"/>
           </a:xfrm>
           <a:prstGeom prst="rect">
@@ -9455,16 +9572,19 @@
           <a:lstStyle/>
           <a:p>
             <a:pPr algn="ctr"/>
-            <a:endParaRPr lang="fr-FR" sz="1600" dirty="0"/>
-          </a:p>
-        </p:txBody>
-      </p:sp>
-      <p:sp>
-        <p:nvSpPr>
-          <p:cNvPr id="56" name="Rectangle 55">
-            <a:extLst>
-              <a:ext uri="{FF2B5EF4-FFF2-40B4-BE49-F238E27FC236}">
-                <a16:creationId xmlns:a16="http://schemas.microsoft.com/office/drawing/2014/main" id="{D8DCA5EE-EC8C-762E-F627-A72AA8861359}"/>
+            <a:r>
+              <a:rPr lang="fr-FR" sz="1600" dirty="0"/>
+              <a:t>8</a:t>
+            </a:r>
+          </a:p>
+        </p:txBody>
+      </p:sp>
+      <p:sp>
+        <p:nvSpPr>
+          <p:cNvPr id="38" name="Rectangle 37">
+            <a:extLst>
+              <a:ext uri="{FF2B5EF4-FFF2-40B4-BE49-F238E27FC236}">
+                <a16:creationId xmlns:a16="http://schemas.microsoft.com/office/drawing/2014/main" id="{48ED59A1-AF9B-7E32-4A3E-13E59A95E23D}"/>
               </a:ext>
             </a:extLst>
           </p:cNvPr>
@@ -9473,18 +9593,15 @@
         </p:nvSpPr>
         <p:spPr>
           <a:xfrm>
-            <a:off x="11327289" y="5598022"/>
-            <a:ext cx="387096" cy="369332"/>
+            <a:off x="10130029" y="1485258"/>
+            <a:ext cx="1554480" cy="146304"/>
           </a:xfrm>
           <a:prstGeom prst="rect">
             <a:avLst/>
           </a:prstGeom>
           <a:solidFill>
-            <a:srgbClr val="002060"/>
+            <a:srgbClr val="00B0F0"/>
           </a:solidFill>
-          <a:ln>
-            <a:noFill/>
-          </a:ln>
         </p:spPr>
         <p:style>
           <a:lnRef idx="2">
@@ -9507,16 +9624,19 @@
           <a:lstStyle/>
           <a:p>
             <a:pPr algn="ctr"/>
-            <a:endParaRPr lang="fr-FR" sz="1600" dirty="0"/>
-          </a:p>
-        </p:txBody>
-      </p:sp>
-      <p:sp>
-        <p:nvSpPr>
-          <p:cNvPr id="57" name="Rectangle 56">
-            <a:extLst>
-              <a:ext uri="{FF2B5EF4-FFF2-40B4-BE49-F238E27FC236}">
-                <a16:creationId xmlns:a16="http://schemas.microsoft.com/office/drawing/2014/main" id="{73BFF83E-CD23-C05E-0C43-DDC2DBC90EAF}"/>
+            <a:r>
+              <a:rPr lang="fr-FR" sz="1100" dirty="0"/>
+              <a:t>ENTREPRISE</a:t>
+            </a:r>
+          </a:p>
+        </p:txBody>
+      </p:sp>
+      <p:sp>
+        <p:nvSpPr>
+          <p:cNvPr id="39" name="Rectangle 38">
+            <a:extLst>
+              <a:ext uri="{FF2B5EF4-FFF2-40B4-BE49-F238E27FC236}">
+                <a16:creationId xmlns:a16="http://schemas.microsoft.com/office/drawing/2014/main" id="{6E0F4AC2-6580-7945-EEC2-0760313470F8}"/>
               </a:ext>
             </a:extLst>
           </p:cNvPr>
@@ -9525,7 +9645,7 @@
         </p:nvSpPr>
         <p:spPr>
           <a:xfrm>
-            <a:off x="10130029" y="1485258"/>
+            <a:off x="10130029" y="2963188"/>
             <a:ext cx="1554480" cy="146304"/>
           </a:xfrm>
           <a:prstGeom prst="rect">
@@ -9565,10 +9685,10 @@
       </p:sp>
       <p:sp>
         <p:nvSpPr>
-          <p:cNvPr id="58" name="Rectangle 57">
-            <a:extLst>
-              <a:ext uri="{FF2B5EF4-FFF2-40B4-BE49-F238E27FC236}">
-                <a16:creationId xmlns:a16="http://schemas.microsoft.com/office/drawing/2014/main" id="{15CB116D-1016-8888-8DA0-C2E41081E8BF}"/>
+          <p:cNvPr id="40" name="Rectangle 39">
+            <a:extLst>
+              <a:ext uri="{FF2B5EF4-FFF2-40B4-BE49-F238E27FC236}">
+                <a16:creationId xmlns:a16="http://schemas.microsoft.com/office/drawing/2014/main" id="{A3A0ABAC-075B-BED0-9F51-21EE7B73F24A}"/>
               </a:ext>
             </a:extLst>
           </p:cNvPr>
@@ -9577,7 +9697,7 @@
         </p:nvSpPr>
         <p:spPr>
           <a:xfrm>
-            <a:off x="10130029" y="2963188"/>
+            <a:off x="10130029" y="4942242"/>
             <a:ext cx="1554480" cy="146304"/>
           </a:xfrm>
           <a:prstGeom prst="rect">
@@ -9617,10 +9737,10 @@
       </p:sp>
       <p:sp>
         <p:nvSpPr>
-          <p:cNvPr id="59" name="Rectangle 58">
-            <a:extLst>
-              <a:ext uri="{FF2B5EF4-FFF2-40B4-BE49-F238E27FC236}">
-                <a16:creationId xmlns:a16="http://schemas.microsoft.com/office/drawing/2014/main" id="{16DF2A7E-C2C5-8E04-1F92-9CF79CBD9578}"/>
+          <p:cNvPr id="41" name="Rectangle 40">
+            <a:extLst>
+              <a:ext uri="{FF2B5EF4-FFF2-40B4-BE49-F238E27FC236}">
+                <a16:creationId xmlns:a16="http://schemas.microsoft.com/office/drawing/2014/main" id="{BEFC1885-2A78-3157-033D-D8D6E9D5A589}"/>
               </a:ext>
             </a:extLst>
           </p:cNvPr>
@@ -9629,15 +9749,18 @@
         </p:nvSpPr>
         <p:spPr>
           <a:xfrm>
-            <a:off x="10130029" y="4518731"/>
-            <a:ext cx="1554480" cy="146304"/>
+            <a:off x="11327289" y="3237259"/>
+            <a:ext cx="387096" cy="369332"/>
           </a:xfrm>
           <a:prstGeom prst="rect">
             <a:avLst/>
           </a:prstGeom>
           <a:solidFill>
-            <a:srgbClr val="00B0F0"/>
+            <a:srgbClr val="D6B4B2"/>
           </a:solidFill>
+          <a:ln>
+            <a:noFill/>
+          </a:ln>
         </p:spPr>
         <p:style>
           <a:lnRef idx="2">
@@ -9661,8 +9784,63 @@
           <a:p>
             <a:pPr algn="ctr"/>
             <a:r>
-              <a:rPr lang="fr-FR" sz="1100" dirty="0"/>
-              <a:t>ENTREPRISE</a:t>
+              <a:rPr lang="fr-FR" sz="1600" dirty="0"/>
+              <a:t>3</a:t>
+            </a:r>
+          </a:p>
+        </p:txBody>
+      </p:sp>
+      <p:sp>
+        <p:nvSpPr>
+          <p:cNvPr id="44" name="Rectangle 43">
+            <a:extLst>
+              <a:ext uri="{FF2B5EF4-FFF2-40B4-BE49-F238E27FC236}">
+                <a16:creationId xmlns:a16="http://schemas.microsoft.com/office/drawing/2014/main" id="{C4A1BA65-5607-4120-10FA-1779330835A2}"/>
+              </a:ext>
+            </a:extLst>
+          </p:cNvPr>
+          <p:cNvSpPr/>
+          <p:nvPr/>
+        </p:nvSpPr>
+        <p:spPr>
+          <a:xfrm>
+            <a:off x="9808481" y="4044280"/>
+            <a:ext cx="387096" cy="369332"/>
+          </a:xfrm>
+          <a:prstGeom prst="rect">
+            <a:avLst/>
+          </a:prstGeom>
+          <a:solidFill>
+            <a:srgbClr val="D6B4B2"/>
+          </a:solidFill>
+          <a:ln>
+            <a:noFill/>
+          </a:ln>
+        </p:spPr>
+        <p:style>
+          <a:lnRef idx="2">
+            <a:schemeClr val="accent1">
+              <a:shade val="15000"/>
+            </a:schemeClr>
+          </a:lnRef>
+          <a:fillRef idx="1">
+            <a:schemeClr val="accent1"/>
+          </a:fillRef>
+          <a:effectRef idx="0">
+            <a:schemeClr val="accent1"/>
+          </a:effectRef>
+          <a:fontRef idx="minor">
+            <a:schemeClr val="lt1"/>
+          </a:fontRef>
+        </p:style>
+        <p:txBody>
+          <a:bodyPr rtlCol="0" anchor="ctr"/>
+          <a:lstStyle/>
+          <a:p>
+            <a:pPr algn="ctr"/>
+            <a:r>
+              <a:rPr lang="fr-FR" sz="1600" dirty="0"/>
+              <a:t>5</a:t>
             </a:r>
           </a:p>
         </p:txBody>
@@ -10605,10 +10783,250 @@
       </p:pic>
       <p:sp>
         <p:nvSpPr>
-          <p:cNvPr id="9" name="Rectangle 8">
-            <a:extLst>
-              <a:ext uri="{FF2B5EF4-FFF2-40B4-BE49-F238E27FC236}">
-                <a16:creationId xmlns:a16="http://schemas.microsoft.com/office/drawing/2014/main" id="{73CBC69B-9407-C284-5271-2EFCA0D64B62}"/>
+          <p:cNvPr id="32" name="Rectangle 31">
+            <a:extLst>
+              <a:ext uri="{FF2B5EF4-FFF2-40B4-BE49-F238E27FC236}">
+                <a16:creationId xmlns:a16="http://schemas.microsoft.com/office/drawing/2014/main" id="{9D934A95-0ED0-3ACC-941C-378D132778DC}"/>
+              </a:ext>
+            </a:extLst>
+          </p:cNvPr>
+          <p:cNvSpPr/>
+          <p:nvPr/>
+        </p:nvSpPr>
+        <p:spPr>
+          <a:xfrm>
+            <a:off x="7947783" y="6074274"/>
+            <a:ext cx="2403335" cy="690599"/>
+          </a:xfrm>
+          <a:prstGeom prst="rect">
+            <a:avLst/>
+          </a:prstGeom>
+          <a:solidFill>
+            <a:srgbClr val="D6B4B2"/>
+          </a:solidFill>
+          <a:ln>
+            <a:noFill/>
+          </a:ln>
+        </p:spPr>
+        <p:style>
+          <a:lnRef idx="2">
+            <a:schemeClr val="accent1">
+              <a:shade val="15000"/>
+            </a:schemeClr>
+          </a:lnRef>
+          <a:fillRef idx="1">
+            <a:schemeClr val="accent1"/>
+          </a:fillRef>
+          <a:effectRef idx="0">
+            <a:schemeClr val="accent1"/>
+          </a:effectRef>
+          <a:fontRef idx="minor">
+            <a:schemeClr val="lt1"/>
+          </a:fontRef>
+        </p:style>
+        <p:txBody>
+          <a:bodyPr rtlCol="0" anchor="ctr"/>
+          <a:lstStyle/>
+          <a:p>
+            <a:pPr algn="ctr"/>
+            <a:r>
+              <a:rPr lang="fr-FR" sz="1600" b="1" dirty="0">
+                <a:solidFill>
+                  <a:schemeClr val="tx1"/>
+                </a:solidFill>
+              </a:rPr>
+              <a:t>CR de TP</a:t>
+            </a:r>
+          </a:p>
+          <a:p>
+            <a:pPr algn="ctr"/>
+            <a:r>
+              <a:rPr lang="fr-FR" sz="1600" dirty="0">
+                <a:solidFill>
+                  <a:schemeClr val="tx1"/>
+                </a:solidFill>
+              </a:rPr>
+              <a:t>Vendredi 16 avril 2026</a:t>
+            </a:r>
+          </a:p>
+          <a:p>
+            <a:pPr algn="ctr"/>
+            <a:r>
+              <a:rPr lang="fr-FR" sz="1200" dirty="0" err="1">
+                <a:solidFill>
+                  <a:schemeClr val="tx1"/>
+                </a:solidFill>
+              </a:rPr>
+              <a:t>eCampus</a:t>
+            </a:r>
+            <a:r>
+              <a:rPr lang="fr-FR" sz="1200" dirty="0">
+                <a:solidFill>
+                  <a:schemeClr val="tx1"/>
+                </a:solidFill>
+              </a:rPr>
+              <a:t> (21h)</a:t>
+            </a:r>
+          </a:p>
+        </p:txBody>
+      </p:sp>
+      <p:sp>
+        <p:nvSpPr>
+          <p:cNvPr id="33" name="Rectangle 32">
+            <a:extLst>
+              <a:ext uri="{FF2B5EF4-FFF2-40B4-BE49-F238E27FC236}">
+                <a16:creationId xmlns:a16="http://schemas.microsoft.com/office/drawing/2014/main" id="{7B94511E-D83E-A088-E21E-197D66C16D37}"/>
+              </a:ext>
+            </a:extLst>
+          </p:cNvPr>
+          <p:cNvSpPr/>
+          <p:nvPr/>
+        </p:nvSpPr>
+        <p:spPr>
+          <a:xfrm>
+            <a:off x="10460737" y="6074274"/>
+            <a:ext cx="1695641" cy="690599"/>
+          </a:xfrm>
+          <a:prstGeom prst="rect">
+            <a:avLst/>
+          </a:prstGeom>
+          <a:solidFill>
+            <a:srgbClr val="D6B4B2"/>
+          </a:solidFill>
+          <a:ln>
+            <a:noFill/>
+          </a:ln>
+        </p:spPr>
+        <p:style>
+          <a:lnRef idx="2">
+            <a:schemeClr val="accent1">
+              <a:shade val="15000"/>
+            </a:schemeClr>
+          </a:lnRef>
+          <a:fillRef idx="1">
+            <a:schemeClr val="accent1"/>
+          </a:fillRef>
+          <a:effectRef idx="0">
+            <a:schemeClr val="accent1"/>
+          </a:effectRef>
+          <a:fontRef idx="minor">
+            <a:schemeClr val="lt1"/>
+          </a:fontRef>
+        </p:style>
+        <p:txBody>
+          <a:bodyPr rtlCol="0" anchor="ctr"/>
+          <a:lstStyle/>
+          <a:p>
+            <a:r>
+              <a:rPr lang="fr-FR" sz="1200" b="1" dirty="0">
+                <a:solidFill>
+                  <a:schemeClr val="tx1"/>
+                </a:solidFill>
+              </a:rPr>
+              <a:t>CR</a:t>
+            </a:r>
+            <a:r>
+              <a:rPr lang="fr-FR" sz="1200" dirty="0">
+                <a:solidFill>
+                  <a:schemeClr val="tx1"/>
+                </a:solidFill>
+              </a:rPr>
+              <a:t> -&gt; PDF</a:t>
+            </a:r>
+          </a:p>
+          <a:p>
+            <a:r>
+              <a:rPr lang="fr-FR" sz="1200" b="1" dirty="0" err="1">
+                <a:solidFill>
+                  <a:schemeClr val="tx1"/>
+                </a:solidFill>
+              </a:rPr>
+              <a:t>Code</a:t>
+            </a:r>
+            <a:r>
+              <a:rPr lang="fr-FR" sz="1200" dirty="0" err="1">
+                <a:solidFill>
+                  <a:schemeClr val="tx1"/>
+                </a:solidFill>
+              </a:rPr>
+              <a:t>+Images</a:t>
+            </a:r>
+            <a:r>
+              <a:rPr lang="fr-FR" sz="1200" dirty="0">
+                <a:solidFill>
+                  <a:schemeClr val="tx1"/>
+                </a:solidFill>
+              </a:rPr>
+              <a:t> -&gt; ZIP</a:t>
+            </a:r>
+            <a:endParaRPr lang="fr-FR" sz="1050" dirty="0">
+              <a:solidFill>
+                <a:schemeClr val="tx1"/>
+              </a:solidFill>
+            </a:endParaRPr>
+          </a:p>
+        </p:txBody>
+      </p:sp>
+      <p:sp>
+        <p:nvSpPr>
+          <p:cNvPr id="6" name="Rectangle 5">
+            <a:extLst>
+              <a:ext uri="{FF2B5EF4-FFF2-40B4-BE49-F238E27FC236}">
+                <a16:creationId xmlns:a16="http://schemas.microsoft.com/office/drawing/2014/main" id="{8B767731-9AE2-C1BF-43F7-54B8404224A5}"/>
+              </a:ext>
+            </a:extLst>
+          </p:cNvPr>
+          <p:cNvSpPr/>
+          <p:nvPr/>
+        </p:nvSpPr>
+        <p:spPr>
+          <a:xfrm>
+            <a:off x="11297413" y="1702590"/>
+            <a:ext cx="387096" cy="369332"/>
+          </a:xfrm>
+          <a:prstGeom prst="rect">
+            <a:avLst/>
+          </a:prstGeom>
+          <a:solidFill>
+            <a:schemeClr val="bg1"/>
+          </a:solidFill>
+          <a:ln>
+            <a:solidFill>
+              <a:srgbClr val="002060"/>
+            </a:solidFill>
+          </a:ln>
+        </p:spPr>
+        <p:style>
+          <a:lnRef idx="2">
+            <a:schemeClr val="accent1">
+              <a:shade val="15000"/>
+            </a:schemeClr>
+          </a:lnRef>
+          <a:fillRef idx="1">
+            <a:schemeClr val="accent1"/>
+          </a:fillRef>
+          <a:effectRef idx="0">
+            <a:schemeClr val="accent1"/>
+          </a:effectRef>
+          <a:fontRef idx="minor">
+            <a:schemeClr val="lt1"/>
+          </a:fontRef>
+        </p:style>
+        <p:txBody>
+          <a:bodyPr rtlCol="0" anchor="ctr"/>
+          <a:lstStyle/>
+          <a:p>
+            <a:pPr algn="ctr"/>
+            <a:endParaRPr lang="fr-FR" sz="1600" dirty="0"/>
+          </a:p>
+        </p:txBody>
+      </p:sp>
+      <p:sp>
+        <p:nvSpPr>
+          <p:cNvPr id="10" name="Rectangle 9">
+            <a:extLst>
+              <a:ext uri="{FF2B5EF4-FFF2-40B4-BE49-F238E27FC236}">
+                <a16:creationId xmlns:a16="http://schemas.microsoft.com/office/drawing/2014/main" id="{2611DFBB-6724-C675-153C-5FB652481A65}"/>
               </a:ext>
             </a:extLst>
           </p:cNvPr>
@@ -10667,10 +11085,175 @@
       </p:sp>
       <p:sp>
         <p:nvSpPr>
-          <p:cNvPr id="24" name="Rectangle 23">
-            <a:extLst>
-              <a:ext uri="{FF2B5EF4-FFF2-40B4-BE49-F238E27FC236}">
-                <a16:creationId xmlns:a16="http://schemas.microsoft.com/office/drawing/2014/main" id="{A55B308B-A0ED-EE71-101C-399C83BDB167}"/>
+          <p:cNvPr id="12" name="Rectangle 11">
+            <a:extLst>
+              <a:ext uri="{FF2B5EF4-FFF2-40B4-BE49-F238E27FC236}">
+                <a16:creationId xmlns:a16="http://schemas.microsoft.com/office/drawing/2014/main" id="{C94DA0AF-E006-AFC8-D307-9C1C7107AEB3}"/>
+              </a:ext>
+            </a:extLst>
+          </p:cNvPr>
+          <p:cNvSpPr/>
+          <p:nvPr/>
+        </p:nvSpPr>
+        <p:spPr>
+          <a:xfrm>
+            <a:off x="11297413" y="2102563"/>
+            <a:ext cx="387096" cy="369332"/>
+          </a:xfrm>
+          <a:prstGeom prst="rect">
+            <a:avLst/>
+          </a:prstGeom>
+          <a:solidFill>
+            <a:srgbClr val="002060"/>
+          </a:solidFill>
+          <a:ln>
+            <a:noFill/>
+          </a:ln>
+        </p:spPr>
+        <p:style>
+          <a:lnRef idx="2">
+            <a:schemeClr val="accent1">
+              <a:shade val="15000"/>
+            </a:schemeClr>
+          </a:lnRef>
+          <a:fillRef idx="1">
+            <a:schemeClr val="accent1"/>
+          </a:fillRef>
+          <a:effectRef idx="0">
+            <a:schemeClr val="accent1"/>
+          </a:effectRef>
+          <a:fontRef idx="minor">
+            <a:schemeClr val="lt1"/>
+          </a:fontRef>
+        </p:style>
+        <p:txBody>
+          <a:bodyPr rtlCol="0" anchor="ctr"/>
+          <a:lstStyle/>
+          <a:p>
+            <a:pPr algn="ctr"/>
+            <a:r>
+              <a:rPr lang="fr-FR" sz="1600" dirty="0"/>
+              <a:t>1</a:t>
+            </a:r>
+          </a:p>
+        </p:txBody>
+      </p:sp>
+      <p:sp>
+        <p:nvSpPr>
+          <p:cNvPr id="18" name="Rectangle 17">
+            <a:extLst>
+              <a:ext uri="{FF2B5EF4-FFF2-40B4-BE49-F238E27FC236}">
+                <a16:creationId xmlns:a16="http://schemas.microsoft.com/office/drawing/2014/main" id="{153C61CE-4C7D-2DE2-F505-B07B5E173D17}"/>
+              </a:ext>
+            </a:extLst>
+          </p:cNvPr>
+          <p:cNvSpPr/>
+          <p:nvPr/>
+        </p:nvSpPr>
+        <p:spPr>
+          <a:xfrm>
+            <a:off x="11297413" y="2502536"/>
+            <a:ext cx="387096" cy="369332"/>
+          </a:xfrm>
+          <a:prstGeom prst="rect">
+            <a:avLst/>
+          </a:prstGeom>
+          <a:solidFill>
+            <a:srgbClr val="002060"/>
+          </a:solidFill>
+          <a:ln>
+            <a:noFill/>
+          </a:ln>
+        </p:spPr>
+        <p:style>
+          <a:lnRef idx="2">
+            <a:schemeClr val="accent1">
+              <a:shade val="15000"/>
+            </a:schemeClr>
+          </a:lnRef>
+          <a:fillRef idx="1">
+            <a:schemeClr val="accent1"/>
+          </a:fillRef>
+          <a:effectRef idx="0">
+            <a:schemeClr val="accent1"/>
+          </a:effectRef>
+          <a:fontRef idx="minor">
+            <a:schemeClr val="lt1"/>
+          </a:fontRef>
+        </p:style>
+        <p:txBody>
+          <a:bodyPr rtlCol="0" anchor="ctr"/>
+          <a:lstStyle/>
+          <a:p>
+            <a:pPr algn="ctr"/>
+            <a:r>
+              <a:rPr lang="fr-FR" sz="1600" dirty="0"/>
+              <a:t>2</a:t>
+            </a:r>
+          </a:p>
+        </p:txBody>
+      </p:sp>
+      <p:sp>
+        <p:nvSpPr>
+          <p:cNvPr id="22" name="Rectangle 21">
+            <a:extLst>
+              <a:ext uri="{FF2B5EF4-FFF2-40B4-BE49-F238E27FC236}">
+                <a16:creationId xmlns:a16="http://schemas.microsoft.com/office/drawing/2014/main" id="{967AC04D-8550-5241-4310-DD295DC39AC3}"/>
+              </a:ext>
+            </a:extLst>
+          </p:cNvPr>
+          <p:cNvSpPr/>
+          <p:nvPr/>
+        </p:nvSpPr>
+        <p:spPr>
+          <a:xfrm>
+            <a:off x="11327289" y="4467223"/>
+            <a:ext cx="387096" cy="369332"/>
+          </a:xfrm>
+          <a:prstGeom prst="rect">
+            <a:avLst/>
+          </a:prstGeom>
+          <a:solidFill>
+            <a:srgbClr val="002060"/>
+          </a:solidFill>
+          <a:ln>
+            <a:noFill/>
+          </a:ln>
+        </p:spPr>
+        <p:style>
+          <a:lnRef idx="2">
+            <a:schemeClr val="accent1">
+              <a:shade val="15000"/>
+            </a:schemeClr>
+          </a:lnRef>
+          <a:fillRef idx="1">
+            <a:schemeClr val="accent1"/>
+          </a:fillRef>
+          <a:effectRef idx="0">
+            <a:schemeClr val="accent1"/>
+          </a:effectRef>
+          <a:fontRef idx="minor">
+            <a:schemeClr val="lt1"/>
+          </a:fontRef>
+        </p:style>
+        <p:txBody>
+          <a:bodyPr rtlCol="0" anchor="ctr"/>
+          <a:lstStyle/>
+          <a:p>
+            <a:pPr algn="ctr"/>
+            <a:r>
+              <a:rPr lang="fr-FR" sz="1600" dirty="0"/>
+              <a:t>7</a:t>
+            </a:r>
+          </a:p>
+        </p:txBody>
+      </p:sp>
+      <p:sp>
+        <p:nvSpPr>
+          <p:cNvPr id="35" name="Rectangle 34">
+            <a:extLst>
+              <a:ext uri="{FF2B5EF4-FFF2-40B4-BE49-F238E27FC236}">
+                <a16:creationId xmlns:a16="http://schemas.microsoft.com/office/drawing/2014/main" id="{0D7C3B31-F200-F66D-F986-CA2C9A08831E}"/>
               </a:ext>
             </a:extLst>
           </p:cNvPr>
@@ -10729,10 +11312,10 @@
       </p:sp>
       <p:sp>
         <p:nvSpPr>
-          <p:cNvPr id="34" name="Rectangle 33">
-            <a:extLst>
-              <a:ext uri="{FF2B5EF4-FFF2-40B4-BE49-F238E27FC236}">
-                <a16:creationId xmlns:a16="http://schemas.microsoft.com/office/drawing/2014/main" id="{231AEDD3-1185-3F17-602B-541D15EE942F}"/>
+          <p:cNvPr id="36" name="Rectangle 35">
+            <a:extLst>
+              <a:ext uri="{FF2B5EF4-FFF2-40B4-BE49-F238E27FC236}">
+                <a16:creationId xmlns:a16="http://schemas.microsoft.com/office/drawing/2014/main" id="{443A8838-8FBE-EFCE-304F-5D4F75CA14F1}"/>
               </a:ext>
             </a:extLst>
           </p:cNvPr>
@@ -10788,10 +11371,10 @@
       </p:sp>
       <p:sp>
         <p:nvSpPr>
-          <p:cNvPr id="42" name="Rectangle 41">
-            <a:extLst>
-              <a:ext uri="{FF2B5EF4-FFF2-40B4-BE49-F238E27FC236}">
-                <a16:creationId xmlns:a16="http://schemas.microsoft.com/office/drawing/2014/main" id="{AF371019-338B-2DC6-52EA-B5A48F5182A4}"/>
+          <p:cNvPr id="37" name="Rectangle 36">
+            <a:extLst>
+              <a:ext uri="{FF2B5EF4-FFF2-40B4-BE49-F238E27FC236}">
+                <a16:creationId xmlns:a16="http://schemas.microsoft.com/office/drawing/2014/main" id="{3C26162A-E646-92A4-129C-FE9087134BC1}"/>
               </a:ext>
             </a:extLst>
           </p:cNvPr>
@@ -10847,10 +11430,10 @@
       </p:sp>
       <p:sp>
         <p:nvSpPr>
-          <p:cNvPr id="57" name="Rectangle 56">
-            <a:extLst>
-              <a:ext uri="{FF2B5EF4-FFF2-40B4-BE49-F238E27FC236}">
-                <a16:creationId xmlns:a16="http://schemas.microsoft.com/office/drawing/2014/main" id="{F3644267-393D-B72B-8EF1-30F3F59D7AA1}"/>
+          <p:cNvPr id="38" name="Rectangle 37">
+            <a:extLst>
+              <a:ext uri="{FF2B5EF4-FFF2-40B4-BE49-F238E27FC236}">
+                <a16:creationId xmlns:a16="http://schemas.microsoft.com/office/drawing/2014/main" id="{AAFEA372-B31D-0F6D-BE59-31FFF5969B31}"/>
               </a:ext>
             </a:extLst>
           </p:cNvPr>
@@ -10859,14 +11442,14 @@
         </p:nvSpPr>
         <p:spPr>
           <a:xfrm>
-            <a:off x="10332720" y="5198049"/>
-            <a:ext cx="761073" cy="369332"/>
+            <a:off x="11327289" y="3644307"/>
+            <a:ext cx="387096" cy="369332"/>
           </a:xfrm>
           <a:prstGeom prst="rect">
             <a:avLst/>
           </a:prstGeom>
           <a:solidFill>
-            <a:srgbClr val="92D050"/>
+            <a:srgbClr val="D6B4B2"/>
           </a:solidFill>
           <a:ln>
             <a:noFill/>
@@ -10894,22 +11477,18 @@
           <a:p>
             <a:pPr algn="ctr"/>
             <a:r>
-              <a:rPr lang="fr-FR" sz="1400" b="1" dirty="0">
-                <a:solidFill>
-                  <a:schemeClr val="tx1"/>
-                </a:solidFill>
-              </a:rPr>
-              <a:t>TP3a</a:t>
-            </a:r>
-          </a:p>
-        </p:txBody>
-      </p:sp>
-      <p:sp>
-        <p:nvSpPr>
-          <p:cNvPr id="58" name="Rectangle 57">
-            <a:extLst>
-              <a:ext uri="{FF2B5EF4-FFF2-40B4-BE49-F238E27FC236}">
-                <a16:creationId xmlns:a16="http://schemas.microsoft.com/office/drawing/2014/main" id="{C222A4F5-BE04-F25B-4CB3-05D5BEF601FC}"/>
+              <a:rPr lang="fr-FR" sz="1600" dirty="0"/>
+              <a:t>4</a:t>
+            </a:r>
+          </a:p>
+        </p:txBody>
+      </p:sp>
+      <p:sp>
+        <p:nvSpPr>
+          <p:cNvPr id="39" name="Rectangle 38">
+            <a:extLst>
+              <a:ext uri="{FF2B5EF4-FFF2-40B4-BE49-F238E27FC236}">
+                <a16:creationId xmlns:a16="http://schemas.microsoft.com/office/drawing/2014/main" id="{BCCBB342-6F8F-6FB8-34CE-DD867A450C00}"/>
               </a:ext>
             </a:extLst>
           </p:cNvPr>
@@ -10918,14 +11497,14 @@
         </p:nvSpPr>
         <p:spPr>
           <a:xfrm>
-            <a:off x="10332720" y="5598022"/>
-            <a:ext cx="761073" cy="369332"/>
+            <a:off x="11327289" y="4044280"/>
+            <a:ext cx="387096" cy="369332"/>
           </a:xfrm>
           <a:prstGeom prst="rect">
             <a:avLst/>
           </a:prstGeom>
           <a:solidFill>
-            <a:srgbClr val="92D050"/>
+            <a:srgbClr val="002060"/>
           </a:solidFill>
           <a:ln>
             <a:noFill/>
@@ -10953,22 +11532,18 @@
           <a:p>
             <a:pPr algn="ctr"/>
             <a:r>
-              <a:rPr lang="fr-FR" sz="1400" b="1" dirty="0">
-                <a:solidFill>
-                  <a:schemeClr val="tx1"/>
-                </a:solidFill>
-              </a:rPr>
-              <a:t>TP3b</a:t>
-            </a:r>
-          </a:p>
-        </p:txBody>
-      </p:sp>
-      <p:sp>
-        <p:nvSpPr>
-          <p:cNvPr id="61" name="Rectangle 60">
-            <a:extLst>
-              <a:ext uri="{FF2B5EF4-FFF2-40B4-BE49-F238E27FC236}">
-                <a16:creationId xmlns:a16="http://schemas.microsoft.com/office/drawing/2014/main" id="{86ED91B5-BE1C-D3CA-FAB2-412C0BAD0598}"/>
+              <a:rPr lang="fr-FR" sz="1600" dirty="0"/>
+              <a:t>6</a:t>
+            </a:r>
+          </a:p>
+        </p:txBody>
+      </p:sp>
+      <p:sp>
+        <p:nvSpPr>
+          <p:cNvPr id="40" name="Rectangle 39">
+            <a:extLst>
+              <a:ext uri="{FF2B5EF4-FFF2-40B4-BE49-F238E27FC236}">
+                <a16:creationId xmlns:a16="http://schemas.microsoft.com/office/drawing/2014/main" id="{90A31E77-575C-977E-8C05-4A8D9FF69F6B}"/>
               </a:ext>
             </a:extLst>
           </p:cNvPr>
@@ -10977,15 +11552,18 @@
         </p:nvSpPr>
         <p:spPr>
           <a:xfrm>
-            <a:off x="10130029" y="1485258"/>
-            <a:ext cx="1554480" cy="146304"/>
+            <a:off x="10332720" y="4479277"/>
+            <a:ext cx="761073" cy="369332"/>
           </a:xfrm>
           <a:prstGeom prst="rect">
             <a:avLst/>
           </a:prstGeom>
           <a:solidFill>
-            <a:srgbClr val="00B0F0"/>
+            <a:srgbClr val="92D050"/>
           </a:solidFill>
+          <a:ln>
+            <a:noFill/>
+          </a:ln>
         </p:spPr>
         <p:style>
           <a:lnRef idx="2">
@@ -11009,18 +11587,22 @@
           <a:p>
             <a:pPr algn="ctr"/>
             <a:r>
-              <a:rPr lang="fr-FR" sz="1100" dirty="0"/>
-              <a:t>ENTREPRISE</a:t>
-            </a:r>
-          </a:p>
-        </p:txBody>
-      </p:sp>
-      <p:sp>
-        <p:nvSpPr>
-          <p:cNvPr id="62" name="Rectangle 61">
-            <a:extLst>
-              <a:ext uri="{FF2B5EF4-FFF2-40B4-BE49-F238E27FC236}">
-                <a16:creationId xmlns:a16="http://schemas.microsoft.com/office/drawing/2014/main" id="{02BC9BF7-180C-22BC-170E-AF0C8AFA2518}"/>
+              <a:rPr lang="fr-FR" sz="1400" b="1" dirty="0">
+                <a:solidFill>
+                  <a:schemeClr val="tx1"/>
+                </a:solidFill>
+              </a:rPr>
+              <a:t>TP3a</a:t>
+            </a:r>
+          </a:p>
+        </p:txBody>
+      </p:sp>
+      <p:sp>
+        <p:nvSpPr>
+          <p:cNvPr id="41" name="Rectangle 40">
+            <a:extLst>
+              <a:ext uri="{FF2B5EF4-FFF2-40B4-BE49-F238E27FC236}">
+                <a16:creationId xmlns:a16="http://schemas.microsoft.com/office/drawing/2014/main" id="{03592892-FC87-68DE-DA61-2F80F2A1BE1F}"/>
               </a:ext>
             </a:extLst>
           </p:cNvPr>
@@ -11029,15 +11611,18 @@
         </p:nvSpPr>
         <p:spPr>
           <a:xfrm>
-            <a:off x="10130029" y="2963188"/>
-            <a:ext cx="1554480" cy="146304"/>
+            <a:off x="10332720" y="5221587"/>
+            <a:ext cx="761073" cy="369332"/>
           </a:xfrm>
           <a:prstGeom prst="rect">
             <a:avLst/>
           </a:prstGeom>
           <a:solidFill>
-            <a:srgbClr val="00B0F0"/>
+            <a:srgbClr val="92D050"/>
           </a:solidFill>
+          <a:ln>
+            <a:noFill/>
+          </a:ln>
         </p:spPr>
         <p:style>
           <a:lnRef idx="2">
@@ -11061,18 +11646,22 @@
           <a:p>
             <a:pPr algn="ctr"/>
             <a:r>
-              <a:rPr lang="fr-FR" sz="1100" dirty="0"/>
-              <a:t>ENTREPRISE</a:t>
-            </a:r>
-          </a:p>
-        </p:txBody>
-      </p:sp>
-      <p:sp>
-        <p:nvSpPr>
-          <p:cNvPr id="63" name="Rectangle 62">
-            <a:extLst>
-              <a:ext uri="{FF2B5EF4-FFF2-40B4-BE49-F238E27FC236}">
-                <a16:creationId xmlns:a16="http://schemas.microsoft.com/office/drawing/2014/main" id="{022D5D26-4B21-EAC1-D3F5-ABAFA0E2AE3B}"/>
+              <a:rPr lang="fr-FR" sz="1400" b="1" dirty="0">
+                <a:solidFill>
+                  <a:schemeClr val="tx1"/>
+                </a:solidFill>
+              </a:rPr>
+              <a:t>TP3b</a:t>
+            </a:r>
+          </a:p>
+        </p:txBody>
+      </p:sp>
+      <p:sp>
+        <p:nvSpPr>
+          <p:cNvPr id="44" name="Rectangle 43">
+            <a:extLst>
+              <a:ext uri="{FF2B5EF4-FFF2-40B4-BE49-F238E27FC236}">
+                <a16:creationId xmlns:a16="http://schemas.microsoft.com/office/drawing/2014/main" id="{FDC7AB35-FF62-0C6C-8B2B-391F043B5CB1}"/>
               </a:ext>
             </a:extLst>
           </p:cNvPr>
@@ -11081,15 +11670,18 @@
         </p:nvSpPr>
         <p:spPr>
           <a:xfrm>
-            <a:off x="10130029" y="4518731"/>
-            <a:ext cx="1554480" cy="146304"/>
+            <a:off x="11327289" y="5621560"/>
+            <a:ext cx="387096" cy="369332"/>
           </a:xfrm>
           <a:prstGeom prst="rect">
             <a:avLst/>
           </a:prstGeom>
           <a:solidFill>
-            <a:srgbClr val="00B0F0"/>
+            <a:srgbClr val="92D050"/>
           </a:solidFill>
+          <a:ln>
+            <a:noFill/>
+          </a:ln>
         </p:spPr>
         <p:style>
           <a:lnRef idx="2">
@@ -11113,18 +11705,18 @@
           <a:p>
             <a:pPr algn="ctr"/>
             <a:r>
-              <a:rPr lang="fr-FR" sz="1100" dirty="0"/>
-              <a:t>ENTREPRISE</a:t>
-            </a:r>
-          </a:p>
-        </p:txBody>
-      </p:sp>
-      <p:sp>
-        <p:nvSpPr>
-          <p:cNvPr id="5" name="Rectangle 4">
-            <a:extLst>
-              <a:ext uri="{FF2B5EF4-FFF2-40B4-BE49-F238E27FC236}">
-                <a16:creationId xmlns:a16="http://schemas.microsoft.com/office/drawing/2014/main" id="{30E0DDE9-FC92-C570-DB5D-40DE4A3368ED}"/>
+              <a:rPr lang="fr-FR" sz="1600" dirty="0"/>
+              <a:t>9</a:t>
+            </a:r>
+          </a:p>
+        </p:txBody>
+      </p:sp>
+      <p:sp>
+        <p:nvSpPr>
+          <p:cNvPr id="45" name="Rectangle 44">
+            <a:extLst>
+              <a:ext uri="{FF2B5EF4-FFF2-40B4-BE49-F238E27FC236}">
+                <a16:creationId xmlns:a16="http://schemas.microsoft.com/office/drawing/2014/main" id="{BC6AC966-1C25-08B4-CA31-38D23DB337DA}"/>
               </a:ext>
             </a:extLst>
           </p:cNvPr>
@@ -11133,14 +11725,14 @@
         </p:nvSpPr>
         <p:spPr>
           <a:xfrm>
-            <a:off x="11297413" y="1702590"/>
+            <a:off x="10703028" y="5625691"/>
             <a:ext cx="387096" cy="369332"/>
           </a:xfrm>
           <a:prstGeom prst="rect">
             <a:avLst/>
           </a:prstGeom>
           <a:solidFill>
-            <a:srgbClr val="002060"/>
+            <a:srgbClr val="92D050"/>
           </a:solidFill>
           <a:ln>
             <a:noFill/>
@@ -11167,16 +11759,19 @@
           <a:lstStyle/>
           <a:p>
             <a:pPr algn="ctr"/>
-            <a:endParaRPr lang="fr-FR" sz="1600" dirty="0"/>
-          </a:p>
-        </p:txBody>
-      </p:sp>
-      <p:sp>
-        <p:nvSpPr>
-          <p:cNvPr id="19" name="Rectangle 18">
-            <a:extLst>
-              <a:ext uri="{FF2B5EF4-FFF2-40B4-BE49-F238E27FC236}">
-                <a16:creationId xmlns:a16="http://schemas.microsoft.com/office/drawing/2014/main" id="{73006338-9AA8-6D22-5C2B-DB60D4F1AA51}"/>
+            <a:r>
+              <a:rPr lang="fr-FR" sz="1600" dirty="0"/>
+              <a:t>8</a:t>
+            </a:r>
+          </a:p>
+        </p:txBody>
+      </p:sp>
+      <p:sp>
+        <p:nvSpPr>
+          <p:cNvPr id="46" name="Rectangle 45">
+            <a:extLst>
+              <a:ext uri="{FF2B5EF4-FFF2-40B4-BE49-F238E27FC236}">
+                <a16:creationId xmlns:a16="http://schemas.microsoft.com/office/drawing/2014/main" id="{ABC830FB-E1E4-CBAB-20B5-442E77785C89}"/>
               </a:ext>
             </a:extLst>
           </p:cNvPr>
@@ -11185,18 +11780,15 @@
         </p:nvSpPr>
         <p:spPr>
           <a:xfrm>
-            <a:off x="11297413" y="2102563"/>
-            <a:ext cx="387096" cy="369332"/>
+            <a:off x="10130029" y="1485258"/>
+            <a:ext cx="1554480" cy="146304"/>
           </a:xfrm>
           <a:prstGeom prst="rect">
             <a:avLst/>
           </a:prstGeom>
           <a:solidFill>
-            <a:srgbClr val="002060"/>
+            <a:srgbClr val="00B0F0"/>
           </a:solidFill>
-          <a:ln>
-            <a:noFill/>
-          </a:ln>
         </p:spPr>
         <p:style>
           <a:lnRef idx="2">
@@ -11219,16 +11811,19 @@
           <a:lstStyle/>
           <a:p>
             <a:pPr algn="ctr"/>
-            <a:endParaRPr lang="fr-FR" sz="1600" dirty="0"/>
-          </a:p>
-        </p:txBody>
-      </p:sp>
-      <p:sp>
-        <p:nvSpPr>
-          <p:cNvPr id="25" name="Rectangle 24">
-            <a:extLst>
-              <a:ext uri="{FF2B5EF4-FFF2-40B4-BE49-F238E27FC236}">
-                <a16:creationId xmlns:a16="http://schemas.microsoft.com/office/drawing/2014/main" id="{2F1680B4-62D4-F9AD-A399-A6BA6E5C7B83}"/>
+            <a:r>
+              <a:rPr lang="fr-FR" sz="1100" dirty="0"/>
+              <a:t>ENTREPRISE</a:t>
+            </a:r>
+          </a:p>
+        </p:txBody>
+      </p:sp>
+      <p:sp>
+        <p:nvSpPr>
+          <p:cNvPr id="47" name="Rectangle 46">
+            <a:extLst>
+              <a:ext uri="{FF2B5EF4-FFF2-40B4-BE49-F238E27FC236}">
+                <a16:creationId xmlns:a16="http://schemas.microsoft.com/office/drawing/2014/main" id="{0FB7904A-EBBE-7CBD-7416-10E5AD9A0489}"/>
               </a:ext>
             </a:extLst>
           </p:cNvPr>
@@ -11237,18 +11832,15 @@
         </p:nvSpPr>
         <p:spPr>
           <a:xfrm>
-            <a:off x="11297413" y="2502536"/>
-            <a:ext cx="387096" cy="369332"/>
+            <a:off x="10130029" y="2963188"/>
+            <a:ext cx="1554480" cy="146304"/>
           </a:xfrm>
           <a:prstGeom prst="rect">
             <a:avLst/>
           </a:prstGeom>
           <a:solidFill>
-            <a:srgbClr val="002060"/>
+            <a:srgbClr val="00B0F0"/>
           </a:solidFill>
-          <a:ln>
-            <a:noFill/>
-          </a:ln>
         </p:spPr>
         <p:style>
           <a:lnRef idx="2">
@@ -11271,16 +11863,19 @@
           <a:lstStyle/>
           <a:p>
             <a:pPr algn="ctr"/>
-            <a:endParaRPr lang="fr-FR" sz="1600" dirty="0"/>
-          </a:p>
-        </p:txBody>
-      </p:sp>
-      <p:sp>
-        <p:nvSpPr>
-          <p:cNvPr id="26" name="Rectangle 25">
-            <a:extLst>
-              <a:ext uri="{FF2B5EF4-FFF2-40B4-BE49-F238E27FC236}">
-                <a16:creationId xmlns:a16="http://schemas.microsoft.com/office/drawing/2014/main" id="{84F30758-02C8-FA58-8ECE-950D797F8E15}"/>
+            <a:r>
+              <a:rPr lang="fr-FR" sz="1100" dirty="0"/>
+              <a:t>ENTREPRISE</a:t>
+            </a:r>
+          </a:p>
+        </p:txBody>
+      </p:sp>
+      <p:sp>
+        <p:nvSpPr>
+          <p:cNvPr id="48" name="Rectangle 47">
+            <a:extLst>
+              <a:ext uri="{FF2B5EF4-FFF2-40B4-BE49-F238E27FC236}">
+                <a16:creationId xmlns:a16="http://schemas.microsoft.com/office/drawing/2014/main" id="{DB4E8666-5DB7-7219-088E-919850399CA6}"/>
               </a:ext>
             </a:extLst>
           </p:cNvPr>
@@ -11289,18 +11884,15 @@
         </p:nvSpPr>
         <p:spPr>
           <a:xfrm>
-            <a:off x="11327289" y="3244334"/>
-            <a:ext cx="387096" cy="369332"/>
+            <a:off x="10130029" y="4942242"/>
+            <a:ext cx="1554480" cy="146304"/>
           </a:xfrm>
           <a:prstGeom prst="rect">
             <a:avLst/>
           </a:prstGeom>
           <a:solidFill>
-            <a:srgbClr val="D6B4B2"/>
+            <a:srgbClr val="00B0F0"/>
           </a:solidFill>
-          <a:ln>
-            <a:noFill/>
-          </a:ln>
         </p:spPr>
         <p:style>
           <a:lnRef idx="2">
@@ -11324,22 +11916,18 @@
           <a:p>
             <a:pPr algn="ctr"/>
             <a:r>
-              <a:rPr lang="fr-FR" sz="1600" dirty="0">
-                <a:solidFill>
-                  <a:schemeClr val="tx1"/>
-                </a:solidFill>
-              </a:rPr>
-              <a:t>x</a:t>
-            </a:r>
-          </a:p>
-        </p:txBody>
-      </p:sp>
-      <p:sp>
-        <p:nvSpPr>
-          <p:cNvPr id="27" name="Rectangle 26">
-            <a:extLst>
-              <a:ext uri="{FF2B5EF4-FFF2-40B4-BE49-F238E27FC236}">
-                <a16:creationId xmlns:a16="http://schemas.microsoft.com/office/drawing/2014/main" id="{8FEF5CFC-20F7-1C5F-0709-5D1710930474}"/>
+              <a:rPr lang="fr-FR" sz="1100" dirty="0"/>
+              <a:t>ENTREPRISE</a:t>
+            </a:r>
+          </a:p>
+        </p:txBody>
+      </p:sp>
+      <p:sp>
+        <p:nvSpPr>
+          <p:cNvPr id="49" name="Rectangle 48">
+            <a:extLst>
+              <a:ext uri="{FF2B5EF4-FFF2-40B4-BE49-F238E27FC236}">
+                <a16:creationId xmlns:a16="http://schemas.microsoft.com/office/drawing/2014/main" id="{85BBF68D-F606-138F-4F59-F13C61B43F33}"/>
               </a:ext>
             </a:extLst>
           </p:cNvPr>
@@ -11348,7 +11936,7 @@
         </p:nvSpPr>
         <p:spPr>
           <a:xfrm>
-            <a:off x="11327289" y="3644307"/>
+            <a:off x="11327289" y="3237259"/>
             <a:ext cx="387096" cy="369332"/>
           </a:xfrm>
           <a:prstGeom prst="rect">
@@ -11382,16 +11970,19 @@
           <a:lstStyle/>
           <a:p>
             <a:pPr algn="ctr"/>
-            <a:endParaRPr lang="fr-FR" sz="1600" dirty="0"/>
-          </a:p>
-        </p:txBody>
-      </p:sp>
-      <p:sp>
-        <p:nvSpPr>
-          <p:cNvPr id="28" name="Rectangle 27">
-            <a:extLst>
-              <a:ext uri="{FF2B5EF4-FFF2-40B4-BE49-F238E27FC236}">
-                <a16:creationId xmlns:a16="http://schemas.microsoft.com/office/drawing/2014/main" id="{ED63D6CB-30C5-F0F8-78BF-360645DF63F0}"/>
+            <a:r>
+              <a:rPr lang="fr-FR" sz="1600" dirty="0"/>
+              <a:t>3</a:t>
+            </a:r>
+          </a:p>
+        </p:txBody>
+      </p:sp>
+      <p:sp>
+        <p:nvSpPr>
+          <p:cNvPr id="50" name="Rectangle 49">
+            <a:extLst>
+              <a:ext uri="{FF2B5EF4-FFF2-40B4-BE49-F238E27FC236}">
+                <a16:creationId xmlns:a16="http://schemas.microsoft.com/office/drawing/2014/main" id="{F5E0C44B-0525-AF1C-539C-D659788E5D81}"/>
               </a:ext>
             </a:extLst>
           </p:cNvPr>
@@ -11400,7 +11991,7 @@
         </p:nvSpPr>
         <p:spPr>
           <a:xfrm>
-            <a:off x="11327289" y="4044280"/>
+            <a:off x="9808481" y="4044280"/>
             <a:ext cx="387096" cy="369332"/>
           </a:xfrm>
           <a:prstGeom prst="rect">
@@ -11434,349 +12025,10 @@
           <a:lstStyle/>
           <a:p>
             <a:pPr algn="ctr"/>
-            <a:endParaRPr lang="fr-FR" sz="1600" dirty="0"/>
-          </a:p>
-        </p:txBody>
-      </p:sp>
-      <p:sp>
-        <p:nvSpPr>
-          <p:cNvPr id="29" name="Rectangle 28">
-            <a:extLst>
-              <a:ext uri="{FF2B5EF4-FFF2-40B4-BE49-F238E27FC236}">
-                <a16:creationId xmlns:a16="http://schemas.microsoft.com/office/drawing/2014/main" id="{306D69D5-9D1A-F869-7CC7-6C4B5543048D}"/>
-              </a:ext>
-            </a:extLst>
-          </p:cNvPr>
-          <p:cNvSpPr/>
-          <p:nvPr/>
-        </p:nvSpPr>
-        <p:spPr>
-          <a:xfrm>
-            <a:off x="11327289" y="4798076"/>
-            <a:ext cx="387096" cy="369332"/>
-          </a:xfrm>
-          <a:prstGeom prst="rect">
-            <a:avLst/>
-          </a:prstGeom>
-          <a:solidFill>
-            <a:srgbClr val="92D050"/>
-          </a:solidFill>
-          <a:ln>
-            <a:noFill/>
-          </a:ln>
-        </p:spPr>
-        <p:style>
-          <a:lnRef idx="2">
-            <a:schemeClr val="accent1">
-              <a:shade val="15000"/>
-            </a:schemeClr>
-          </a:lnRef>
-          <a:fillRef idx="1">
-            <a:schemeClr val="accent1"/>
-          </a:fillRef>
-          <a:effectRef idx="0">
-            <a:schemeClr val="accent1"/>
-          </a:effectRef>
-          <a:fontRef idx="minor">
-            <a:schemeClr val="lt1"/>
-          </a:fontRef>
-        </p:style>
-        <p:txBody>
-          <a:bodyPr rtlCol="0" anchor="ctr"/>
-          <a:lstStyle/>
-          <a:p>
-            <a:pPr algn="ctr"/>
-            <a:endParaRPr lang="fr-FR" sz="1600" dirty="0"/>
-          </a:p>
-        </p:txBody>
-      </p:sp>
-      <p:sp>
-        <p:nvSpPr>
-          <p:cNvPr id="30" name="Rectangle 29">
-            <a:extLst>
-              <a:ext uri="{FF2B5EF4-FFF2-40B4-BE49-F238E27FC236}">
-                <a16:creationId xmlns:a16="http://schemas.microsoft.com/office/drawing/2014/main" id="{0AFE9FC1-32A2-CAD0-B29E-DCC63FB8FBD8}"/>
-              </a:ext>
-            </a:extLst>
-          </p:cNvPr>
-          <p:cNvSpPr/>
-          <p:nvPr/>
-        </p:nvSpPr>
-        <p:spPr>
-          <a:xfrm>
-            <a:off x="11327289" y="5198049"/>
-            <a:ext cx="387096" cy="369332"/>
-          </a:xfrm>
-          <a:prstGeom prst="rect">
-            <a:avLst/>
-          </a:prstGeom>
-          <a:solidFill>
-            <a:srgbClr val="92D050"/>
-          </a:solidFill>
-          <a:ln>
-            <a:noFill/>
-          </a:ln>
-        </p:spPr>
-        <p:style>
-          <a:lnRef idx="2">
-            <a:schemeClr val="accent1">
-              <a:shade val="15000"/>
-            </a:schemeClr>
-          </a:lnRef>
-          <a:fillRef idx="1">
-            <a:schemeClr val="accent1"/>
-          </a:fillRef>
-          <a:effectRef idx="0">
-            <a:schemeClr val="accent1"/>
-          </a:effectRef>
-          <a:fontRef idx="minor">
-            <a:schemeClr val="lt1"/>
-          </a:fontRef>
-        </p:style>
-        <p:txBody>
-          <a:bodyPr rtlCol="0" anchor="ctr"/>
-          <a:lstStyle/>
-          <a:p>
-            <a:pPr algn="ctr"/>
-            <a:endParaRPr lang="fr-FR" sz="1600" dirty="0"/>
-          </a:p>
-        </p:txBody>
-      </p:sp>
-      <p:sp>
-        <p:nvSpPr>
-          <p:cNvPr id="31" name="Rectangle 30">
-            <a:extLst>
-              <a:ext uri="{FF2B5EF4-FFF2-40B4-BE49-F238E27FC236}">
-                <a16:creationId xmlns:a16="http://schemas.microsoft.com/office/drawing/2014/main" id="{B964479B-77F9-1529-726F-721AEE16CD00}"/>
-              </a:ext>
-            </a:extLst>
-          </p:cNvPr>
-          <p:cNvSpPr/>
-          <p:nvPr/>
-        </p:nvSpPr>
-        <p:spPr>
-          <a:xfrm>
-            <a:off x="11327289" y="5598022"/>
-            <a:ext cx="387096" cy="369332"/>
-          </a:xfrm>
-          <a:prstGeom prst="rect">
-            <a:avLst/>
-          </a:prstGeom>
-          <a:solidFill>
-            <a:srgbClr val="002060"/>
-          </a:solidFill>
-          <a:ln>
-            <a:noFill/>
-          </a:ln>
-        </p:spPr>
-        <p:style>
-          <a:lnRef idx="2">
-            <a:schemeClr val="accent1">
-              <a:shade val="15000"/>
-            </a:schemeClr>
-          </a:lnRef>
-          <a:fillRef idx="1">
-            <a:schemeClr val="accent1"/>
-          </a:fillRef>
-          <a:effectRef idx="0">
-            <a:schemeClr val="accent1"/>
-          </a:effectRef>
-          <a:fontRef idx="minor">
-            <a:schemeClr val="lt1"/>
-          </a:fontRef>
-        </p:style>
-        <p:txBody>
-          <a:bodyPr rtlCol="0" anchor="ctr"/>
-          <a:lstStyle/>
-          <a:p>
-            <a:pPr algn="ctr"/>
-            <a:endParaRPr lang="fr-FR" sz="1600" dirty="0"/>
-          </a:p>
-        </p:txBody>
-      </p:sp>
-      <p:sp>
-        <p:nvSpPr>
-          <p:cNvPr id="32" name="Rectangle 31">
-            <a:extLst>
-              <a:ext uri="{FF2B5EF4-FFF2-40B4-BE49-F238E27FC236}">
-                <a16:creationId xmlns:a16="http://schemas.microsoft.com/office/drawing/2014/main" id="{9D934A95-0ED0-3ACC-941C-378D132778DC}"/>
-              </a:ext>
-            </a:extLst>
-          </p:cNvPr>
-          <p:cNvSpPr/>
-          <p:nvPr/>
-        </p:nvSpPr>
-        <p:spPr>
-          <a:xfrm>
-            <a:off x="8138270" y="6074274"/>
-            <a:ext cx="2212848" cy="690599"/>
-          </a:xfrm>
-          <a:prstGeom prst="rect">
-            <a:avLst/>
-          </a:prstGeom>
-          <a:solidFill>
-            <a:srgbClr val="D6B4B2"/>
-          </a:solidFill>
-          <a:ln>
-            <a:noFill/>
-          </a:ln>
-        </p:spPr>
-        <p:style>
-          <a:lnRef idx="2">
-            <a:schemeClr val="accent1">
-              <a:shade val="15000"/>
-            </a:schemeClr>
-          </a:lnRef>
-          <a:fillRef idx="1">
-            <a:schemeClr val="accent1"/>
-          </a:fillRef>
-          <a:effectRef idx="0">
-            <a:schemeClr val="accent1"/>
-          </a:effectRef>
-          <a:fontRef idx="minor">
-            <a:schemeClr val="lt1"/>
-          </a:fontRef>
-        </p:style>
-        <p:txBody>
-          <a:bodyPr rtlCol="0" anchor="ctr"/>
-          <a:lstStyle/>
-          <a:p>
-            <a:pPr algn="ctr"/>
-            <a:r>
-              <a:rPr lang="fr-FR" sz="1600" b="1" dirty="0">
-                <a:solidFill>
-                  <a:schemeClr val="tx1"/>
-                </a:solidFill>
-              </a:rPr>
-              <a:t>CR de TP</a:t>
-            </a:r>
-          </a:p>
-          <a:p>
-            <a:pPr algn="ctr"/>
-            <a:r>
-              <a:rPr lang="fr-FR" sz="1600" dirty="0">
-                <a:solidFill>
-                  <a:schemeClr val="tx1"/>
-                </a:solidFill>
-              </a:rPr>
-              <a:t>Vendredi 4 avril 2025</a:t>
-            </a:r>
-          </a:p>
-          <a:p>
-            <a:pPr algn="ctr"/>
-            <a:r>
-              <a:rPr lang="fr-FR" sz="1200" dirty="0" err="1">
-                <a:solidFill>
-                  <a:schemeClr val="tx1"/>
-                </a:solidFill>
-              </a:rPr>
-              <a:t>eCampus</a:t>
-            </a:r>
-            <a:r>
-              <a:rPr lang="fr-FR" sz="1200" dirty="0">
-                <a:solidFill>
-                  <a:schemeClr val="tx1"/>
-                </a:solidFill>
-              </a:rPr>
-              <a:t> (21h)</a:t>
-            </a:r>
-          </a:p>
-        </p:txBody>
-      </p:sp>
-      <p:sp>
-        <p:nvSpPr>
-          <p:cNvPr id="33" name="Rectangle 32">
-            <a:extLst>
-              <a:ext uri="{FF2B5EF4-FFF2-40B4-BE49-F238E27FC236}">
-                <a16:creationId xmlns:a16="http://schemas.microsoft.com/office/drawing/2014/main" id="{7B94511E-D83E-A088-E21E-197D66C16D37}"/>
-              </a:ext>
-            </a:extLst>
-          </p:cNvPr>
-          <p:cNvSpPr/>
-          <p:nvPr/>
-        </p:nvSpPr>
-        <p:spPr>
-          <a:xfrm>
-            <a:off x="10460737" y="6074274"/>
-            <a:ext cx="1695641" cy="690599"/>
-          </a:xfrm>
-          <a:prstGeom prst="rect">
-            <a:avLst/>
-          </a:prstGeom>
-          <a:solidFill>
-            <a:srgbClr val="D6B4B2"/>
-          </a:solidFill>
-          <a:ln>
-            <a:noFill/>
-          </a:ln>
-        </p:spPr>
-        <p:style>
-          <a:lnRef idx="2">
-            <a:schemeClr val="accent1">
-              <a:shade val="15000"/>
-            </a:schemeClr>
-          </a:lnRef>
-          <a:fillRef idx="1">
-            <a:schemeClr val="accent1"/>
-          </a:fillRef>
-          <a:effectRef idx="0">
-            <a:schemeClr val="accent1"/>
-          </a:effectRef>
-          <a:fontRef idx="minor">
-            <a:schemeClr val="lt1"/>
-          </a:fontRef>
-        </p:style>
-        <p:txBody>
-          <a:bodyPr rtlCol="0" anchor="ctr"/>
-          <a:lstStyle/>
-          <a:p>
-            <a:r>
-              <a:rPr lang="fr-FR" sz="1200" b="1" dirty="0">
-                <a:solidFill>
-                  <a:schemeClr val="tx1"/>
-                </a:solidFill>
-              </a:rPr>
-              <a:t>CR</a:t>
-            </a:r>
-            <a:r>
-              <a:rPr lang="fr-FR" sz="1200" dirty="0">
-                <a:solidFill>
-                  <a:schemeClr val="tx1"/>
-                </a:solidFill>
-              </a:rPr>
-              <a:t> -&gt; PDF</a:t>
-            </a:r>
-          </a:p>
-          <a:p>
-            <a:r>
-              <a:rPr lang="fr-FR" sz="1200" b="1" dirty="0" err="1">
-                <a:solidFill>
-                  <a:schemeClr val="tx1"/>
-                </a:solidFill>
-              </a:rPr>
-              <a:t>Code</a:t>
-            </a:r>
-            <a:r>
-              <a:rPr lang="fr-FR" sz="1200" dirty="0" err="1">
-                <a:solidFill>
-                  <a:schemeClr val="tx1"/>
-                </a:solidFill>
-              </a:rPr>
-              <a:t>+Images</a:t>
-            </a:r>
-            <a:r>
-              <a:rPr lang="fr-FR" sz="1200" dirty="0">
-                <a:solidFill>
-                  <a:schemeClr val="tx1"/>
-                </a:solidFill>
-              </a:rPr>
-              <a:t> -&gt; ZIP</a:t>
-            </a:r>
-            <a:endParaRPr lang="fr-FR" sz="1050" dirty="0">
-              <a:solidFill>
-                <a:schemeClr val="tx1"/>
-              </a:solidFill>
-            </a:endParaRPr>
+            <a:r>
+              <a:rPr lang="fr-FR" sz="1600" dirty="0"/>
+              <a:t>5</a:t>
+            </a:r>
           </a:p>
         </p:txBody>
       </p:sp>
